--- a/decks/day4/module-5-evaluation.pptx
+++ b/decks/day4/module-5-evaluation.pptx
@@ -16,9 +16,10 @@
     <p:sldId id="264" r:id="rId10"/>
     <p:sldId id="265" r:id="rId11"/>
     <p:sldId id="266" r:id="rId12"/>
+    <p:sldId id="267" r:id="rId13"/>
   </p:sldIdLst>
   <p:notesMasterIdLst>
-    <p:notesMasterId r:id="rId13"/>
+    <p:notesMasterId r:id="rId14"/>
   </p:notesMasterIdLst>
   <p:sldSz cx="9144000" cy="5143500"/>
   <p:notesSz cx="5143500" cy="9144000"/>
@@ -601,8 +602,8 @@
           <a:p>
             <a:r>
               <a:rPr lang="en-US" dirty="0"/>
-              <a:t>• Direct extension of Day 3 Module 7's num_repetitions slide — multi-agent workflows have MORE nondeterminism sources than a single agent (every agent's own model call, plus the orchestrator's routing decisions), so this matters even more, not less.
-• GROUNDING SOURCE: https://learn.microsoft.com/en-us/agent-framework/agents/evaluation</a:t>
+              <a:t>• Placeholder marker slide — the runbook has full narration, setup, and fallback plan. Self-contained, deliberately small (a tiny 2-agent researcher -&gt; writer workflow via SequentialBuilder, one local dict-backed tool) — same spirit as Day 3 Module 7's evaluation demo, not the full lab harness.
+• GROUNDING SOURCE: https://learn.microsoft.com/azure/foundry/concepts/evaluation-evaluators/agent-evaluators</a:t>
             </a:r>
             <a:endParaRPr lang="en-US" dirty="0"/>
           </a:p>
@@ -690,9 +691,8 @@
           <a:p>
             <a:r>
               <a:rPr lang="en-US" dirty="0"/>
-              <a:t>• Ask attendees which evaluator would catch a Planner that never assigns work to the Retriever at all. Answer: Task Navigation Efficiency (or Tool Selection at the process level) — not Task Completion, which only checks the final deliverable and could be fooled by a lucky final answer.
-• GROUNDING SOURCE: https://learn.microsoft.com/azure/foundry/concepts/evaluation-evaluators/agent-evaluators
-• GROUNDING SOURCE: https://learn.microsoft.com/en-us/agent-framework/agents/observability</a:t>
+              <a:t>• Direct extension of Day 3 Module 7's num_repetitions slide — multi-agent workflows have MORE nondeterminism sources than a single agent (every agent's own model call, plus the orchestrator's routing decisions), so this matters even more, not less.
+• GROUNDING SOURCE: https://learn.microsoft.com/en-us/agent-framework/agents/evaluation</a:t>
             </a:r>
             <a:endParaRPr lang="en-US" dirty="0"/>
           </a:p>
@@ -716,6 +716,96 @@
             <a:fld id="{F7021451-1387-4CA6-816F-3879F97B5CBC}" type="slidenum">
               <a:rPr lang="en-US"/>
               <a:t>11</a:t>
+            </a:fld>
+            <a:endParaRPr lang="en-US"/>
+          </a:p>
+        </p:txBody>
+      </p:sp>
+    </p:spTree>
+    <p:extLst>
+      <p:ext uri="{BB962C8B-B14F-4D97-AF65-F5344CB8AC3E}">
+        <p14:creationId xmlns:p14="http://schemas.microsoft.com/office/powerpoint/2010/main" val="1024086991"/>
+      </p:ext>
+    </p:extLst>
+  </p:cSld>
+  <p:clrMapOvr>
+    <a:masterClrMapping/>
+  </p:clrMapOvr>
+</p:notes>
+</file>
+
+<file path=ppt/notesSlides/notesSlide12.xml><?xml version="1.0" encoding="utf-8"?>
+<p:notes xmlns:a="http://schemas.openxmlformats.org/drawingml/2006/main" xmlns:r="http://schemas.openxmlformats.org/officeDocument/2006/relationships" xmlns:p="http://schemas.openxmlformats.org/presentationml/2006/main">
+  <p:cSld>
+    <p:spTree>
+      <p:nvGrpSpPr>
+        <p:cNvPr id="1" name=""/>
+        <p:cNvGrpSpPr/>
+        <p:nvPr/>
+      </p:nvGrpSpPr>
+      <p:grpSpPr>
+        <a:xfrm>
+          <a:off x="0" y="0"/>
+          <a:ext cx="0" cy="0"/>
+          <a:chOff x="0" y="0"/>
+          <a:chExt cx="0" cy="0"/>
+        </a:xfrm>
+      </p:grpSpPr>
+      <p:sp>
+        <p:nvSpPr>
+          <p:cNvPr id="2" name="Slide Image Placeholder 1"/>
+          <p:cNvSpPr>
+            <a:spLocks noGrp="1" noRot="1" noChangeAspect="1"/>
+          </p:cNvSpPr>
+          <p:nvPr>
+            <p:ph type="sldImg"/>
+          </p:nvPr>
+        </p:nvSpPr>
+        <p:spPr/>
+      </p:sp>
+      <p:sp>
+        <p:nvSpPr>
+          <p:cNvPr id="3" name="Notes Placeholder 2"/>
+          <p:cNvSpPr>
+            <a:spLocks noGrp="1"/>
+          </p:cNvSpPr>
+          <p:nvPr>
+            <p:ph type="body" idx="1"/>
+          </p:nvPr>
+        </p:nvSpPr>
+        <p:spPr/>
+        <p:txBody>
+          <a:bodyPr/>
+          <a:lstStyle/>
+          <a:p>
+            <a:r>
+              <a:rPr lang="en-US" dirty="0"/>
+              <a:t>• Ask attendees which evaluator would catch a Planner that never assigns work to the Retriever at all. Answer: Task Navigation Efficiency (or Tool Selection at the process level) — not Task Completion, which only checks the final deliverable and could be fooled by a lucky final answer.
+• GROUNDING SOURCE: https://learn.microsoft.com/azure/foundry/concepts/evaluation-evaluators/agent-evaluators
+• GROUNDING SOURCE: https://learn.microsoft.com/en-us/agent-framework/agents/observability</a:t>
+            </a:r>
+            <a:endParaRPr lang="en-US" dirty="0"/>
+          </a:p>
+        </p:txBody>
+      </p:sp>
+      <p:sp>
+        <p:nvSpPr>
+          <p:cNvPr id="4" name="Slide Number Placeholder 3"/>
+          <p:cNvSpPr>
+            <a:spLocks noGrp="1"/>
+          </p:cNvSpPr>
+          <p:nvPr>
+            <p:ph type="sldNum" sz="quarter" idx="10"/>
+          </p:nvPr>
+        </p:nvSpPr>
+        <p:spPr/>
+        <p:txBody>
+          <a:bodyPr/>
+          <a:lstStyle/>
+          <a:p>
+            <a:fld id="{F7021451-1387-4CA6-816F-3879F97B5CBC}" type="slidenum">
+              <a:rPr lang="en-US"/>
+              <a:t>12</a:t>
             </a:fld>
             <a:endParaRPr lang="en-US"/>
           </a:p>
@@ -2011,6 +2101,359 @@
     <p:bg>
       <p:bgPr>
         <a:solidFill>
+          <a:srgbClr val="CADCFC"/>
+        </a:solidFill>
+      </p:bgPr>
+    </p:bg>
+    <p:spTree>
+      <p:nvGrpSpPr>
+        <p:cNvPr id="1" name=""/>
+        <p:cNvGrpSpPr/>
+        <p:nvPr/>
+      </p:nvGrpSpPr>
+      <p:grpSpPr>
+        <a:xfrm>
+          <a:off x="0" y="0"/>
+          <a:ext cx="0" cy="0"/>
+          <a:chOff x="0" y="0"/>
+          <a:chExt cx="0" cy="0"/>
+        </a:xfrm>
+      </p:grpSpPr>
+      <p:sp>
+        <p:nvSpPr>
+          <p:cNvPr id="2" name="Shape 0"/>
+          <p:cNvSpPr/>
+          <p:nvPr/>
+        </p:nvSpPr>
+        <p:spPr>
+          <a:xfrm>
+            <a:off x="0" y="0"/>
+            <a:ext cx="146304" cy="5143500"/>
+          </a:xfrm>
+          <a:prstGeom prst="rect">
+            <a:avLst/>
+          </a:prstGeom>
+          <a:solidFill>
+            <a:srgbClr val="1E2761"/>
+          </a:solidFill>
+          <a:ln/>
+        </p:spPr>
+      </p:sp>
+      <p:sp>
+        <p:nvSpPr>
+          <p:cNvPr id="3" name="Text 1"/>
+          <p:cNvSpPr/>
+          <p:nvPr/>
+        </p:nvSpPr>
+        <p:spPr>
+          <a:xfrm>
+            <a:off x="5669280" y="274320"/>
+            <a:ext cx="3291840" cy="274320"/>
+          </a:xfrm>
+          <a:prstGeom prst="rect">
+            <a:avLst/>
+          </a:prstGeom>
+          <a:noFill/>
+          <a:ln/>
+        </p:spPr>
+        <p:txBody>
+          <a:bodyPr wrap="square" lIns="0" tIns="0" rIns="0" bIns="0" rtlCol="0" anchor="ctr"/>
+          <a:lstStyle/>
+          <a:p>
+            <a:pPr algn="r" indent="0" marL="0">
+              <a:buNone/>
+            </a:pPr>
+            <a:r>
+              <a:rPr lang="en-US" sz="1000" dirty="0">
+                <a:solidFill>
+                  <a:srgbClr val="6B7280"/>
+                </a:solidFill>
+                <a:latin typeface="Calibri" pitchFamily="34" charset="0"/>
+                <a:ea typeface="Calibri" pitchFamily="34" charset="-122"/>
+                <a:cs typeface="Calibri" pitchFamily="34" charset="-120"/>
+              </a:rPr>
+              <a:t>Day 4 · Module 5 · Demo</a:t>
+            </a:r>
+            <a:endParaRPr lang="en-US" sz="1000" dirty="0"/>
+          </a:p>
+        </p:txBody>
+      </p:sp>
+      <p:sp>
+        <p:nvSpPr>
+          <p:cNvPr id="4" name="Text 2"/>
+          <p:cNvSpPr/>
+          <p:nvPr/>
+        </p:nvSpPr>
+        <p:spPr>
+          <a:xfrm>
+            <a:off x="548640" y="1051560"/>
+            <a:ext cx="5486400" cy="502920"/>
+          </a:xfrm>
+          <a:prstGeom prst="rect">
+            <a:avLst/>
+          </a:prstGeom>
+          <a:noFill/>
+          <a:ln/>
+        </p:spPr>
+        <p:txBody>
+          <a:bodyPr wrap="square" lIns="0" tIns="0" rIns="0" bIns="0" rtlCol="0" anchor="ctr"/>
+          <a:lstStyle/>
+          <a:p>
+            <a:pPr indent="0" marL="0">
+              <a:buNone/>
+            </a:pPr>
+            <a:r>
+              <a:rPr lang="en-US" sz="3200" b="1" spc="800" kern="0" dirty="0">
+                <a:solidFill>
+                  <a:srgbClr val="1E2761"/>
+                </a:solidFill>
+                <a:latin typeface="Calibri" pitchFamily="34" charset="0"/>
+                <a:ea typeface="Calibri" pitchFamily="34" charset="-122"/>
+                <a:cs typeface="Calibri" pitchFamily="34" charset="-120"/>
+              </a:rPr>
+              <a:t>DEMO</a:t>
+            </a:r>
+            <a:endParaRPr lang="en-US" sz="3200" dirty="0"/>
+          </a:p>
+        </p:txBody>
+      </p:sp>
+      <p:sp>
+        <p:nvSpPr>
+          <p:cNvPr id="5" name="Text 3"/>
+          <p:cNvSpPr/>
+          <p:nvPr/>
+        </p:nvSpPr>
+        <p:spPr>
+          <a:xfrm>
+            <a:off x="548640" y="1691640"/>
+            <a:ext cx="8046720" cy="914400"/>
+          </a:xfrm>
+          <a:prstGeom prst="rect">
+            <a:avLst/>
+          </a:prstGeom>
+          <a:noFill/>
+          <a:ln/>
+        </p:spPr>
+        <p:txBody>
+          <a:bodyPr wrap="square" lIns="0" tIns="0" rIns="0" bIns="0" rtlCol="0" anchor="ctr"/>
+          <a:lstStyle/>
+          <a:p>
+            <a:pPr indent="0" marL="0">
+              <a:buNone/>
+            </a:pPr>
+            <a:r>
+              <a:rPr lang="en-US" sz="3000" b="1" dirty="0">
+                <a:solidFill>
+                  <a:srgbClr val="1E2761"/>
+                </a:solidFill>
+                <a:latin typeface="Calibri" pitchFamily="34" charset="0"/>
+                <a:ea typeface="Calibri" pitchFamily="34" charset="-122"/>
+                <a:cs typeface="Calibri" pitchFamily="34" charset="-120"/>
+              </a:rPr>
+              <a:t>Trajectory, cost, and the eval → change → re-eval loop</a:t>
+            </a:r>
+            <a:endParaRPr lang="en-US" sz="3000" dirty="0"/>
+          </a:p>
+        </p:txBody>
+      </p:sp>
+      <p:sp>
+        <p:nvSpPr>
+          <p:cNvPr id="6" name="Text 4"/>
+          <p:cNvSpPr/>
+          <p:nvPr/>
+        </p:nvSpPr>
+        <p:spPr>
+          <a:xfrm>
+            <a:off x="6583680" y="1051560"/>
+            <a:ext cx="2194560" cy="502920"/>
+          </a:xfrm>
+          <a:prstGeom prst="rect">
+            <a:avLst/>
+          </a:prstGeom>
+          <a:noFill/>
+          <a:ln/>
+        </p:spPr>
+        <p:txBody>
+          <a:bodyPr wrap="square" lIns="0" tIns="0" rIns="0" bIns="0" rtlCol="0" anchor="ctr"/>
+          <a:lstStyle/>
+          <a:p>
+            <a:pPr algn="r" indent="0" marL="0">
+              <a:buNone/>
+            </a:pPr>
+            <a:r>
+              <a:rPr lang="en-US" sz="1800" i="1" dirty="0">
+                <a:solidFill>
+                  <a:srgbClr val="6B7280"/>
+                </a:solidFill>
+                <a:latin typeface="Calibri" pitchFamily="34" charset="0"/>
+                <a:ea typeface="Calibri" pitchFamily="34" charset="-122"/>
+                <a:cs typeface="Calibri" pitchFamily="34" charset="-120"/>
+              </a:rPr>
+              <a:t>~4 min</a:t>
+            </a:r>
+            <a:endParaRPr lang="en-US" sz="1800" dirty="0"/>
+          </a:p>
+        </p:txBody>
+      </p:sp>
+      <p:sp>
+        <p:nvSpPr>
+          <p:cNvPr id="7" name="Text 5"/>
+          <p:cNvSpPr/>
+          <p:nvPr/>
+        </p:nvSpPr>
+        <p:spPr>
+          <a:xfrm>
+            <a:off x="548640" y="2788920"/>
+            <a:ext cx="8046720" cy="1371600"/>
+          </a:xfrm>
+          <a:prstGeom prst="rect">
+            <a:avLst/>
+          </a:prstGeom>
+          <a:noFill/>
+          <a:ln/>
+        </p:spPr>
+        <p:txBody>
+          <a:bodyPr wrap="square" lIns="0" tIns="0" rIns="0" bIns="0" rtlCol="0" anchor="ctr"/>
+          <a:lstStyle/>
+          <a:p>
+            <a:pPr indent="0" marL="0">
+              <a:spcAft>
+                <a:spcPts val="600"/>
+              </a:spcAft>
+              <a:buNone/>
+            </a:pPr>
+            <a:r>
+              <a:rPr lang="en-US" sz="1600" dirty="0">
+                <a:solidFill>
+                  <a:srgbClr val="212121"/>
+                </a:solidFill>
+                <a:latin typeface="Calibri" pitchFamily="34" charset="0"/>
+                <a:ea typeface="Calibri" pitchFamily="34" charset="-122"/>
+                <a:cs typeface="Calibri" pitchFamily="34" charset="-120"/>
+              </a:rPr>
+              <a:t>Run the SAME 2-agent workflow twice: BEFORE, the researcher's instructions are vague and it may skip its one tool — process eval and system eval both at risk of failing. AFTER, one sentence is added requiring the tool call — nothing else changes. Compare trajectory (process eval), the final answer (system eval), and total tokens (cost) across the two runs: this IS the loop the slide just named, run live.</a:t>
+            </a:r>
+            <a:endParaRPr lang="en-US" sz="1600" dirty="0"/>
+          </a:p>
+        </p:txBody>
+      </p:sp>
+      <p:sp>
+        <p:nvSpPr>
+          <p:cNvPr id="8" name="Text 6"/>
+          <p:cNvSpPr/>
+          <p:nvPr/>
+        </p:nvSpPr>
+        <p:spPr>
+          <a:xfrm>
+            <a:off x="548640" y="4434840"/>
+            <a:ext cx="8046720" cy="320040"/>
+          </a:xfrm>
+          <a:prstGeom prst="rect">
+            <a:avLst/>
+          </a:prstGeom>
+          <a:noFill/>
+          <a:ln/>
+        </p:spPr>
+        <p:txBody>
+          <a:bodyPr wrap="square" lIns="0" tIns="0" rIns="0" bIns="0" rtlCol="0" anchor="ctr"/>
+          <a:lstStyle/>
+          <a:p>
+            <a:pPr indent="0" marL="0">
+              <a:buNone/>
+            </a:pPr>
+            <a:r>
+              <a:rPr lang="en-US" sz="1100" i="1" dirty="0">
+                <a:solidFill>
+                  <a:srgbClr val="6B7280"/>
+                </a:solidFill>
+                <a:latin typeface="Calibri" pitchFamily="34" charset="0"/>
+                <a:ea typeface="Calibri" pitchFamily="34" charset="-122"/>
+                <a:cs typeface="Calibri" pitchFamily="34" charset="-120"/>
+              </a:rPr>
+              <a:t>Runbook: demos/day4/module-5-demo-1-trajectory-and-cost.md</a:t>
+            </a:r>
+            <a:endParaRPr lang="en-US" sz="1100" dirty="0"/>
+          </a:p>
+        </p:txBody>
+      </p:sp>
+      <p:sp>
+        <p:nvSpPr>
+          <p:cNvPr id="9" name="Shape 7"/>
+          <p:cNvSpPr/>
+          <p:nvPr/>
+        </p:nvSpPr>
+        <p:spPr>
+          <a:xfrm>
+            <a:off x="365760" y="4773168"/>
+            <a:ext cx="8412480" cy="0"/>
+          </a:xfrm>
+          <a:prstGeom prst="line">
+            <a:avLst/>
+          </a:prstGeom>
+          <a:noFill/>
+          <a:ln w="6350">
+            <a:solidFill>
+              <a:srgbClr val="D1D5DB"/>
+            </a:solidFill>
+            <a:prstDash val="solid"/>
+          </a:ln>
+        </p:spPr>
+      </p:sp>
+      <p:sp>
+        <p:nvSpPr>
+          <p:cNvPr id="10" name="Text 8"/>
+          <p:cNvSpPr/>
+          <p:nvPr/>
+        </p:nvSpPr>
+        <p:spPr>
+          <a:xfrm>
+            <a:off x="384048" y="4818888"/>
+            <a:ext cx="8275320" cy="182880"/>
+          </a:xfrm>
+          <a:prstGeom prst="rect">
+            <a:avLst/>
+          </a:prstGeom>
+          <a:noFill/>
+          <a:ln/>
+        </p:spPr>
+        <p:txBody>
+          <a:bodyPr wrap="square" lIns="0" tIns="0" rIns="0" bIns="0" rtlCol="0" anchor="ctr">
+            <a:normAutofit/>
+          </a:bodyPr>
+          <a:lstStyle/>
+          <a:p>
+            <a:pPr indent="0" marL="0">
+              <a:buNone/>
+            </a:pPr>
+            <a:r>
+              <a:rPr lang="en-US" sz="820" dirty="0">
+                <a:solidFill>
+                  <a:srgbClr val="6B7280"/>
+                </a:solidFill>
+                <a:latin typeface="Calibri" pitchFamily="34" charset="0"/>
+                <a:ea typeface="Calibri" pitchFamily="34" charset="-122"/>
+                <a:cs typeface="Calibri" pitchFamily="34" charset="-120"/>
+              </a:rPr>
+              <a:t>Source: https://learn.microsoft.com/azure/foundry/concepts/evaluation-evaluators/agent-evaluators</a:t>
+            </a:r>
+            <a:endParaRPr lang="en-US" sz="820" dirty="0"/>
+          </a:p>
+        </p:txBody>
+      </p:sp>
+    </p:spTree>
+  </p:cSld>
+  <p:clrMapOvr>
+    <a:masterClrMapping/>
+  </p:clrMapOvr>
+</p:sld>
+</file>
+
+<file path=ppt/slides/slide11.xml><?xml version="1.0" encoding="utf-8"?>
+<p:sld xmlns:a="http://schemas.openxmlformats.org/drawingml/2006/main" xmlns:r="http://schemas.openxmlformats.org/officeDocument/2006/relationships" xmlns:p="http://schemas.openxmlformats.org/presentationml/2006/main">
+  <p:cSld name="Slide 11">
+    <p:bg>
+      <p:bgPr>
+        <a:solidFill>
           <a:srgbClr val="FFFFFF"/>
         </a:solidFill>
       </p:bgPr>
@@ -2290,9 +2733,9 @@
 </p:sld>
 </file>
 
-<file path=ppt/slides/slide11.xml><?xml version="1.0" encoding="utf-8"?>
+<file path=ppt/slides/slide12.xml><?xml version="1.0" encoding="utf-8"?>
 <p:sld xmlns:a="http://schemas.openxmlformats.org/drawingml/2006/main" xmlns:r="http://schemas.openxmlformats.org/officeDocument/2006/relationships" xmlns:p="http://schemas.openxmlformats.org/presentationml/2006/main">
-  <p:cSld name="Slide 11">
+  <p:cSld name="Slide 12">
     <p:bg>
       <p:bgPr>
         <a:solidFill>

--- a/decks/day4/module-5-evaluation.pptx
+++ b/decks/day4/module-5-evaluation.pptx
@@ -1315,7 +1315,7 @@
           <a:p>
             <a:r>
               <a:rPr lang="en-US" dirty="0"/>
-              <a:t>• Extends Day 3 Part E's 3-case golden set to workflow scale. The lab's own spec calls for ~15 realistic questions with expected citations/answers — enough to see a real pass-rate distribution, not just single pass/fail examples.
+              <a:t>• Extends Day 3 Part E's 3-case golden set to workflow scale. Matches the lab's own current golden_set.jsonl and README exactly (8 cases across 4 branches) — updated from an earlier ~15-question, 3-branch spec after the lab's restructure; evaluate.py's own comment explains the 8-case count (8 cases x 3 repetitions x 3 parts is already ~72 workflow runs).
 • GROUNDING SOURCE: https://learn.microsoft.com/en-us/agent-framework/agents/evaluation</a:t>
             </a:r>
             <a:endParaRPr lang="en-US" dirty="0"/>
@@ -7442,7 +7442,7 @@
                 <a:ea typeface="Calibri" pitchFamily="34" charset="-122"/>
                 <a:cs typeface="Calibri" pitchFamily="34" charset="-120"/>
               </a:rPr>
-              <a:t>The lab's own target: ~15 realistic questions, each with expected citations/answers as ground truth</a:t>
+              <a:t>The lab's own golden set: 8 cases across 4 branches — small on purpose, since every case runs against all 3 parts × 3 repetitions (~72 workflow runs already)</a:t>
             </a:r>
             <a:endParaRPr lang="en-US" sz="1600" dirty="0"/>
           </a:p>
@@ -7463,7 +7463,7 @@
                 <a:ea typeface="Calibri" pitchFamily="34" charset="-122"/>
                 <a:cs typeface="Calibri" pitchFamily="34" charset="-120"/>
               </a:rPr>
-              <a:t>Cover the workflow's real branches: a question the Retriever grounds cleanly, one that needs a Critic-triggered revision loop, and a general-knowledge question needing no tools at all</a:t>
+              <a:t>Cover the workflow's real branches: grounded (clean single-document lookup), revision (spans documents, needs a Critic-triggered loop), no_retrieval (general knowledge, no tools), and partial (the corpus answers half — naming the gap is correct, inventing the rest is a failure)</a:t>
             </a:r>
             <a:endParaRPr lang="en-US" sz="1600" dirty="0"/>
           </a:p>

--- a/decks/day4/module-5-evaluation.pptx
+++ b/decks/day4/module-5-evaluation.pptx
@@ -8047,7 +8047,7 @@
         <p:spPr>
           <a:xfrm>
             <a:off x="896112" y="1335024"/>
-            <a:ext cx="1975104" cy="310896"/>
+            <a:ext cx="1975104" cy="311277"/>
           </a:xfrm>
           <a:prstGeom prst="rect">
             <a:avLst/>
@@ -8056,7 +8056,7 @@
           <a:ln/>
         </p:spPr>
         <p:txBody>
-          <a:bodyPr wrap="square" lIns="0" tIns="0" rIns="0" bIns="0" rtlCol="0" anchor="ctr">
+          <a:bodyPr wrap="square" lIns="0" tIns="0" rIns="0" bIns="0" rtlCol="0" anchor="t">
             <a:normAutofit/>
           </a:bodyPr>
           <a:lstStyle/>
@@ -8087,8 +8087,8 @@
         </p:nvSpPr>
         <p:spPr>
           <a:xfrm>
-            <a:off x="512064" y="1719072"/>
-            <a:ext cx="2340864" cy="950976"/>
+            <a:off x="512064" y="1701165"/>
+            <a:ext cx="2340864" cy="996315"/>
           </a:xfrm>
           <a:prstGeom prst="rect">
             <a:avLst/>
@@ -8235,7 +8235,7 @@
         <p:spPr>
           <a:xfrm>
             <a:off x="3785616" y="1335024"/>
-            <a:ext cx="1975104" cy="310896"/>
+            <a:ext cx="1975104" cy="311277"/>
           </a:xfrm>
           <a:prstGeom prst="rect">
             <a:avLst/>
@@ -8244,7 +8244,7 @@
           <a:ln/>
         </p:spPr>
         <p:txBody>
-          <a:bodyPr wrap="square" lIns="0" tIns="0" rIns="0" bIns="0" rtlCol="0" anchor="ctr">
+          <a:bodyPr wrap="square" lIns="0" tIns="0" rIns="0" bIns="0" rtlCol="0" anchor="t">
             <a:normAutofit/>
           </a:bodyPr>
           <a:lstStyle/>
@@ -8275,8 +8275,8 @@
         </p:nvSpPr>
         <p:spPr>
           <a:xfrm>
-            <a:off x="3401568" y="1719072"/>
-            <a:ext cx="2340864" cy="950976"/>
+            <a:off x="3401568" y="1701165"/>
+            <a:ext cx="2340864" cy="996315"/>
           </a:xfrm>
           <a:prstGeom prst="rect">
             <a:avLst/>
@@ -8423,7 +8423,7 @@
         <p:spPr>
           <a:xfrm>
             <a:off x="6675120" y="1335024"/>
-            <a:ext cx="1975104" cy="310896"/>
+            <a:ext cx="1975104" cy="311277"/>
           </a:xfrm>
           <a:prstGeom prst="rect">
             <a:avLst/>
@@ -8432,7 +8432,7 @@
           <a:ln/>
         </p:spPr>
         <p:txBody>
-          <a:bodyPr wrap="square" lIns="0" tIns="0" rIns="0" bIns="0" rtlCol="0" anchor="ctr">
+          <a:bodyPr wrap="square" lIns="0" tIns="0" rIns="0" bIns="0" rtlCol="0" anchor="t">
             <a:normAutofit/>
           </a:bodyPr>
           <a:lstStyle/>
@@ -8463,8 +8463,8 @@
         </p:nvSpPr>
         <p:spPr>
           <a:xfrm>
-            <a:off x="6291072" y="1719072"/>
-            <a:ext cx="2340864" cy="950976"/>
+            <a:off x="6291072" y="1701165"/>
+            <a:ext cx="2340864" cy="996315"/>
           </a:xfrm>
           <a:prstGeom prst="rect">
             <a:avLst/>
@@ -8591,7 +8591,7 @@
         <p:spPr>
           <a:xfrm>
             <a:off x="896112" y="3163824"/>
-            <a:ext cx="1975104" cy="310896"/>
+            <a:ext cx="1975104" cy="311277"/>
           </a:xfrm>
           <a:prstGeom prst="rect">
             <a:avLst/>
@@ -8600,7 +8600,7 @@
           <a:ln/>
         </p:spPr>
         <p:txBody>
-          <a:bodyPr wrap="square" lIns="0" tIns="0" rIns="0" bIns="0" rtlCol="0" anchor="ctr">
+          <a:bodyPr wrap="square" lIns="0" tIns="0" rIns="0" bIns="0" rtlCol="0" anchor="t">
             <a:normAutofit/>
           </a:bodyPr>
           <a:lstStyle/>
@@ -8631,8 +8631,8 @@
         </p:nvSpPr>
         <p:spPr>
           <a:xfrm>
-            <a:off x="512064" y="3547872"/>
-            <a:ext cx="2340864" cy="950976"/>
+            <a:off x="512064" y="3529965"/>
+            <a:ext cx="2340864" cy="996315"/>
           </a:xfrm>
           <a:prstGeom prst="rect">
             <a:avLst/>
@@ -8779,7 +8779,7 @@
         <p:spPr>
           <a:xfrm>
             <a:off x="3785616" y="3163824"/>
-            <a:ext cx="1975104" cy="310896"/>
+            <a:ext cx="1975104" cy="311277"/>
           </a:xfrm>
           <a:prstGeom prst="rect">
             <a:avLst/>
@@ -8788,7 +8788,7 @@
           <a:ln/>
         </p:spPr>
         <p:txBody>
-          <a:bodyPr wrap="square" lIns="0" tIns="0" rIns="0" bIns="0" rtlCol="0" anchor="ctr">
+          <a:bodyPr wrap="square" lIns="0" tIns="0" rIns="0" bIns="0" rtlCol="0" anchor="t">
             <a:normAutofit/>
           </a:bodyPr>
           <a:lstStyle/>
@@ -8819,8 +8819,8 @@
         </p:nvSpPr>
         <p:spPr>
           <a:xfrm>
-            <a:off x="3401568" y="3547872"/>
-            <a:ext cx="2340864" cy="950976"/>
+            <a:off x="3401568" y="3529965"/>
+            <a:ext cx="2340864" cy="996315"/>
           </a:xfrm>
           <a:prstGeom prst="rect">
             <a:avLst/>
